--- a/_7_13.pptx
+++ b/_7_13.pptx
@@ -3837,7 +3837,7 @@
           <a:p>
             <a:r>
               <a:rPr lang="en-US"/>
-              <a:t>系統架構設計 (System Architecture)</a:t>
+              <a:t>系統前/後端架構與實體網域部署</a:t>
             </a:r>
           </a:p>
         </p:txBody>
@@ -3862,19 +3862,19 @@
           <a:p>
             <a:r>
               <a:rPr lang="en-US"/>
-              <a:t>• 前端：EHR 臨床監控面板 (React/HTML5)，支援 1080P/2K/4K 螢幕自適應。</a:t>
+              <a:t>實體專題網域已購置對接：已成功購置並部署公網域名 https://60gigahertz.uk/，外部雷達與相機數據可直接上報至該介面。</a:t>
             </a:r>
           </a:p>
           <a:p>
             <a:r>
               <a:rPr lang="en-US"/>
-              <a:t>• 後端：多執行緒 Python 輕量級 API 伺服器 (server.py)，整合 Cloudflare Tunnel 實現安全穿牆與公網對接。</a:t>
+              <a:t>前端自適應監控面板：採 HTML5 + CSS3 + HSL 白銀臨床風格排版，支援 1080P/2K/4K 顯示器與手機端 100% 完整互動。</a:t>
             </a:r>
           </a:p>
           <a:p>
             <a:r>
               <a:rPr lang="en-US"/>
-              <a:t>• 資料庫：PostgreSQL 地端關聯式資料庫，用於儲存病患、設備與生理觀測記錄。</a:t>
+              <a:t>後端多執行緒 API 伺服器 (server.py)：採用 ThreadingHTTPServer，即時解析多模態生理指標，同時安全寫入本地資料庫。</a:t>
             </a:r>
           </a:p>
         </p:txBody>
@@ -3929,7 +3929,7 @@
           <a:p>
             <a:r>
               <a:rPr lang="en-US"/>
-              <a:t>資料庫設計與實體關聯 (PostgreSQL Schema)</a:t>
+              <a:t>生理監護資料傳輸流程圖 (Data Pipeline)</a:t>
             </a:r>
           </a:p>
         </p:txBody>
@@ -3954,19 +3954,37 @@
           <a:p>
             <a:r>
               <a:rPr lang="en-US"/>
-              <a:t>• 病患基本資料表 (patients)：記錄病歷編號 (MRN998877)、姓名 (蘇先生)、性別與出生日期 (1991-12-25)。</a:t>
+              <a:t>硬體數據採集：FLIR 熱成像採集體溫/姿勢/離床數據 -&gt; 毫米波雷達採集心率/呼吸/跌倒訊號。</a:t>
             </a:r>
           </a:p>
           <a:p>
             <a:r>
               <a:rPr lang="en-US"/>
-              <a:t>• 監測設備資料表 (devices)：對應毫米波生理雷達 (device-radar-01) 及熱感相機 (device-camera-01)。</a:t>
+              <a:t>JSON API 上報：感測設備 POST /api 發送多模態遙測指標 -&gt; 後端接收並自動分流與 LOINC/SNOMED 標準代碼綁定。</a:t>
             </a:r>
           </a:p>
           <a:p>
             <a:r>
               <a:rPr lang="en-US"/>
-              <a:t>• 生理觀測指標表 (observations)：儲存 LOINC 標準生理指標 (體溫、心率、呼吸率) 與 SNOMED CT 狀態碼 (姿勢、離床、跌倒)。</a:t>
+              <a:t>資料庫儲存與呈現：</a:t>
+            </a:r>
+          </a:p>
+          <a:p>
+            <a:r>
+              <a:rPr lang="en-US"/>
+              <a:t>   - 地端保存：即時寫入本地 PostgreSQL 數據庫。</a:t>
+            </a:r>
+          </a:p>
+          <a:p>
+            <a:r>
+              <a:rPr lang="en-US"/>
+              <a:t>   - FHIR 封裝：動態產生符合衛福部規範的 Bundle (GET /api/fhir)。</a:t>
+            </a:r>
+          </a:p>
+          <a:p>
+            <a:r>
+              <a:rPr lang="en-US"/>
+              <a:t>   - 前端呈現：EHR 監控面板每 10 秒自動輪詢更新。</a:t>
             </a:r>
           </a:p>
         </p:txBody>
@@ -4021,7 +4039,7 @@
           <a:p>
             <a:r>
               <a:rPr lang="en-US"/>
-              <a:t>HL7 FHIR 標準合規與電子病歷整合</a:t>
+              <a:t>當前地端資料庫結構與欄位 (PostgreSQL Schema)</a:t>
             </a:r>
           </a:p>
         </p:txBody>
@@ -4046,19 +4064,19 @@
           <a:p>
             <a:r>
               <a:rPr lang="en-US"/>
-              <a:t>• 官方最新標準相容：完全符合中華民國衛生福利部 (MHW) 最新發布的臺灣核心實作指引 (TW Core IG) 規範，採用新版 twcore.mohw.gov.tw 域名定義。</a:t>
+              <a:t>病患基本資料表 (patients)：記錄病歷編號 (MRN998877)、姓名 (蘇先生)、性別 (male)、出生日期 (1991-12-25)。</a:t>
             </a:r>
           </a:p>
           <a:p>
             <a:r>
               <a:rPr lang="en-US"/>
-              <a:t>• 多模態數據封裝：整合生理雷達與熱感相機數據，打包為標準 Bundle (searchset) JSON，實現無縫對接電子病歷。</a:t>
+              <a:t>設備資料表 (devices)：對應毫米波生理雷達 (device-radar-01) 及熱感相機 (device-camera-01)。</a:t>
             </a:r>
           </a:p>
           <a:p>
             <a:r>
               <a:rPr lang="en-US"/>
-              <a:t>• 臨床科研導出功能：支援一鍵導出 Excel-ready CSV 報表與符合 TW Core IG 規範的 FHIR Bundle 檔案。</a:t>
+              <a:t>生理觀測指標表 (observations)：儲存 LOINC 生理指標 (體溫 8310-5、心率 8867-4、呼吸率 9279-1) 與 SNOMED CT 狀態碼 (姿勢、離床、跌倒 242526002)。</a:t>
             </a:r>
           </a:p>
         </p:txBody>
@@ -4113,7 +4131,7 @@
           <a:p>
             <a:r>
               <a:rPr lang="en-US"/>
-              <a:t>系統創新點與連線除錯 (Innovations &amp; Debugging)</a:t>
+              <a:t>衛福部 TW Core IG 官方規範與本系統實體欄位對應</a:t>
             </a:r>
           </a:p>
         </p:txBody>
@@ -4138,13 +4156,37 @@
           <a:p>
             <a:r>
               <a:rPr lang="en-US"/>
-              <a:t>• 雙重非接觸式監護：融合雷達與熱感影像實現雙重生理安全防護，全天候進行離床與跌倒預警監測。</a:t>
+              <a:t>病患資料對應 (Patient Profile)：</a:t>
             </a:r>
           </a:p>
           <a:p>
             <a:r>
               <a:rPr lang="en-US"/>
-              <a:t>• 智慧進程守護防禦：Python 伺服器啟動時自動終止背景殘存的 cloudflared.exe 幽靈進程，徹底根治 502 Bad Gateway 異常。</a:t>
+              <a:t>   - 官方規範：https://twcore.mohw.gov.tw/ig/twcore/StructureDefinition-Patient-twcore.html</a:t>
+            </a:r>
+          </a:p>
+          <a:p>
+            <a:r>
+              <a:rPr lang="en-US"/>
+              <a:t>   - 本系統實體對應：Bundle.entry.resource (Patient.name.text="蘇先生", Patient.gender="male", Patient.birthDate="1991-12-25")。</a:t>
+            </a:r>
+          </a:p>
+          <a:p>
+            <a:r>
+              <a:rPr lang="en-US"/>
+              <a:t>生命徵象對應 (Observation Profile)：</a:t>
+            </a:r>
+          </a:p>
+          <a:p>
+            <a:r>
+              <a:rPr lang="en-US"/>
+              <a:t>   - 官方規範：https://twcore.mohw.gov.tw/ig/twcore/StructureDefinition-Observation-vitalSigns-twcore.html</a:t>
+            </a:r>
+          </a:p>
+          <a:p>
+            <a:r>
+              <a:rPr lang="en-US"/>
+              <a:t>   - 本系統實體對應：LOINC 體溫 (8310-5)、心率 (8867-4)、呼吸率 (9279-1)，格式與代碼定義與衛福部最新國家規範完全相符。</a:t>
             </a:r>
           </a:p>
         </p:txBody>
